--- a/7_PoC.pptx
+++ b/7_PoC.pptx
@@ -319,7 +319,7 @@
                 <a:latin typeface="Georgia"/>
                 <a:ea typeface="Georgia"/>
               </a:rPr>
-              <a:t>Первая линия за 22–26 недель: оборудование,
+              <a:t>Первая линия за 22-26 недель: оборудование,
 данные и модель готовим параллельно</a:t>
             </a:r>
             <a:endParaRPr lang="en-US" sz="2800" noProof="1"/>
@@ -384,7 +384,7 @@
                 <a:latin typeface="Arial"/>
                 <a:ea typeface="Arial"/>
               </a:rPr>
-              <a:t>22–26 недель</a:t>
+              <a:t>22-26 недель</a:t>
             </a:r>
             <a:endParaRPr lang="en-US" sz="2400" noProof="1"/>
           </a:p>
@@ -415,7 +415,7 @@
           <p:nvPr>
             <p:extLst>
               <p:ext uri="{F5677B7D-0D2A-4D9B-9A5C-6D8D7D0E5A5D}">
-                <pptd:line xmlns:pptd="https://kimi-design.msh.team/pptd/2026" xmlns:mc="http://schemas.openxmlformats.org/markup-compatibility/2006" xmlns:m="http://schemas.openxmlformats.org/officeDocument/2006/math" xmlns:cx="http://schemas.microsoft.com/office/drawing/2014/chartex" xmlns:c="http://schemas.openxmlformats.org/drawingml/2006/chart" xmlns:a14="http://schemas.microsoft.com/office/drawing/2010/main" xmlns="" encoding="base64url">eyJ2aWV3Qm94IjpbMSw0N10sInBvaW50cyI6IjAsMCAwLDQ3In0</pptd:line>
+                <pptd:line xmlns="" xmlns:a14="http://schemas.microsoft.com/office/drawing/2010/main" xmlns:c="http://schemas.openxmlformats.org/drawingml/2006/chart" xmlns:cx="http://schemas.microsoft.com/office/drawing/2014/chartex" xmlns:m="http://schemas.openxmlformats.org/officeDocument/2006/math" xmlns:mc="http://schemas.openxmlformats.org/markup-compatibility/2006" xmlns:pptd="https://kimi-design.msh.team/pptd/2026" encoding="base64url">eyJ2aWV3Qm94IjpbMSw0N10sInBvaW50cyI6IjAsMCAwLDQ3In0</pptd:line>
               </p:ext>
             </p:extLst>
           </p:nvPr>
@@ -518,7 +518,7 @@
           <p:nvPr>
             <p:extLst>
               <p:ext uri="{F5677B7D-0D2A-4D9B-9A5C-6D8D7D0E5A5D}">
-                <pptd:line xmlns:pptd="https://kimi-design.msh.team/pptd/2026" xmlns:mc="http://schemas.openxmlformats.org/markup-compatibility/2006" xmlns:m="http://schemas.openxmlformats.org/officeDocument/2006/math" xmlns:cx="http://schemas.microsoft.com/office/drawing/2014/chartex" xmlns:c="http://schemas.openxmlformats.org/drawingml/2006/chart" xmlns:a14="http://schemas.microsoft.com/office/drawing/2010/main" xmlns="" encoding="base64url">eyJ2aWV3Qm94IjpbMSw0N10sInBvaW50cyI6IjAsMCAwLDQ3In0</pptd:line>
+                <pptd:line xmlns="" xmlns:a14="http://schemas.microsoft.com/office/drawing/2010/main" xmlns:c="http://schemas.openxmlformats.org/drawingml/2006/chart" xmlns:cx="http://schemas.microsoft.com/office/drawing/2014/chartex" xmlns:m="http://schemas.openxmlformats.org/officeDocument/2006/math" xmlns:mc="http://schemas.openxmlformats.org/markup-compatibility/2006" xmlns:pptd="https://kimi-design.msh.team/pptd/2026" encoding="base64url">eyJ2aWV3Qm94IjpbMSw0N10sInBvaW50cyI6IjAsMCAwLDQ3In0</pptd:line>
               </p:ext>
             </p:extLst>
           </p:nvPr>
@@ -590,7 +590,7 @@
                 <a:latin typeface="Arial"/>
                 <a:ea typeface="Arial"/>
               </a:rPr>
-              <a:t>4–8 недель</a:t>
+              <a:t>4-8 недель</a:t>
             </a:r>
             <a:endParaRPr lang="en-US" sz="2400" noProof="1"/>
           </a:p>
@@ -692,7 +692,7 @@
                 <a:latin typeface="Arial"/>
                 <a:ea typeface="Arial"/>
               </a:rPr>
-              <a:t>1–4 недели</a:t>
+              <a:t>1-4 недели</a:t>
             </a:r>
             <a:endParaRPr lang="en-US" sz="1150" noProof="1"/>
           </a:p>
@@ -773,7 +773,7 @@
                 <a:latin typeface="Arial"/>
                 <a:ea typeface="Arial"/>
               </a:rPr>
-              <a:t>3–10 недели</a:t>
+              <a:t>3-10 недели</a:t>
             </a:r>
             <a:endParaRPr lang="en-US" sz="1150" noProof="1"/>
           </a:p>
@@ -854,7 +854,7 @@
                 <a:latin typeface="Arial"/>
                 <a:ea typeface="Arial"/>
               </a:rPr>
-              <a:t>4–13 недели</a:t>
+              <a:t>4-13 недели</a:t>
             </a:r>
             <a:endParaRPr lang="en-US" sz="1150" noProof="1"/>
           </a:p>
@@ -935,7 +935,7 @@
                 <a:latin typeface="Arial"/>
                 <a:ea typeface="Arial"/>
               </a:rPr>
-              <a:t>10–16 недель</a:t>
+              <a:t>10-16 недель</a:t>
             </a:r>
             <a:endParaRPr lang="en-US" sz="1150" noProof="1"/>
           </a:p>
@@ -1016,7 +1016,7 @@
                 <a:latin typeface="Arial"/>
                 <a:ea typeface="Arial"/>
               </a:rPr>
-              <a:t>17–26 недель</a:t>
+              <a:t>17-26 недель</a:t>
             </a:r>
             <a:endParaRPr lang="en-US" sz="1150" noProof="1"/>
           </a:p>
@@ -1068,7 +1068,7 @@
           <p:nvPr>
             <p:extLst>
               <p:ext uri="{F5677B7D-0D2A-4D9B-9A5C-6D8D7D0E5A5D}">
-                <pptd:line xmlns:pptd="https://kimi-design.msh.team/pptd/2026" xmlns:mc="http://schemas.openxmlformats.org/markup-compatibility/2006" xmlns:m="http://schemas.openxmlformats.org/officeDocument/2006/math" xmlns:cx="http://schemas.microsoft.com/office/drawing/2014/chartex" xmlns:c="http://schemas.openxmlformats.org/drawingml/2006/chart" xmlns:a14="http://schemas.microsoft.com/office/drawing/2010/main" xmlns="" encoding="base64url">eyJ2aWV3Qm94IjpbODY0LDFdLCJwb2ludHMiOiIwLDAgODY0LDAifQ</pptd:line>
+                <pptd:line xmlns="" xmlns:a14="http://schemas.microsoft.com/office/drawing/2010/main" xmlns:c="http://schemas.openxmlformats.org/drawingml/2006/chart" xmlns:cx="http://schemas.microsoft.com/office/drawing/2014/chartex" xmlns:m="http://schemas.openxmlformats.org/officeDocument/2006/math" xmlns:mc="http://schemas.openxmlformats.org/markup-compatibility/2006" xmlns:pptd="https://kimi-design.msh.team/pptd/2026" encoding="base64url">eyJ2aWV3Qm94IjpbODY0LDFdLCJwb2ludHMiOiIwLDAgODY0LDAifQ</pptd:line>
               </p:ext>
             </p:extLst>
           </p:nvPr>
@@ -1260,7 +1260,7 @@
                 <a:latin typeface="Arial"/>
                 <a:ea typeface="Arial"/>
               </a:rPr>
-              <a:t>≈42 смены = 8–9 недель</a:t>
+              <a:t>≈42 смены = 8-9 недель</a:t>
             </a:r>
             <a:endParaRPr lang="en-US" sz="1200" noProof="1"/>
           </a:p>
@@ -1273,7 +1273,7 @@
           <p:nvPr>
             <p:extLst>
               <p:ext uri="{F5677B7D-0D2A-4D9B-9A5C-6D8D7D0E5A5D}">
-                <pptd:line xmlns:pptd="https://kimi-design.msh.team/pptd/2026" xmlns:mc="http://schemas.openxmlformats.org/markup-compatibility/2006" xmlns:m="http://schemas.openxmlformats.org/officeDocument/2006/math" xmlns:cx="http://schemas.microsoft.com/office/drawing/2014/chartex" xmlns:c="http://schemas.openxmlformats.org/drawingml/2006/chart" xmlns:a14="http://schemas.microsoft.com/office/drawing/2010/main" xmlns="" encoding="base64url">eyJ2aWV3Qm94IjpbMSw5NV0sInBvaW50cyI6IjAsMCAwLDk1In0</pptd:line>
+                <pptd:line xmlns="" xmlns:a14="http://schemas.microsoft.com/office/drawing/2010/main" xmlns:c="http://schemas.openxmlformats.org/drawingml/2006/chart" xmlns:cx="http://schemas.microsoft.com/office/drawing/2014/chartex" xmlns:m="http://schemas.openxmlformats.org/officeDocument/2006/math" xmlns:mc="http://schemas.openxmlformats.org/markup-compatibility/2006" xmlns:pptd="https://kimi-design.msh.team/pptd/2026" encoding="base64url">eyJ2aWV3Qm94IjpbMSw5NV0sInBvaW50cyI6IjAsMCAwLDk1In0</pptd:line>
               </p:ext>
             </p:extLst>
           </p:nvPr>
@@ -1387,7 +1387,7 @@
                 <a:latin typeface="Arial"/>
                 <a:ea typeface="Arial"/>
               </a:rPr>
-              <a:t>16–20 недель:</a:t>
+              <a:t>16-20 недель:</a:t>
             </a:r>
             <a:r>
               <a:rPr lang="en-US" sz="1150" noProof="1">
@@ -1415,7 +1415,7 @@
                 <a:latin typeface="Arial"/>
                 <a:ea typeface="Arial"/>
               </a:rPr>
-              <a:t>7–9 месяцев:</a:t>
+              <a:t>7-9 месяцев:</a:t>
             </a:r>
             <a:r>
               <a:rPr lang="en-US" sz="1150" noProof="1">
@@ -1700,7 +1700,7 @@
                 <a:latin typeface="Arial"/>
                 <a:ea typeface="Arial"/>
               </a:rPr>
-              <a:t>Работы на линии: 8–9 недель</a:t>
+              <a:t>Работы на линии: 8-9 недель</a:t>
             </a:r>
             <a:endParaRPr lang="en-US" sz="1100" noProof="1"/>
           </a:p>
@@ -2110,7 +2110,7 @@
                 <a:latin typeface="Arial"/>
                 <a:ea typeface="Arial"/>
               </a:rPr>
-              <a:t>Неделя — два оператора, неделя — CV; сопоставляются продукция, партии и смены.</a:t>
+              <a:t>Неделя - два оператора, неделя - CV; сопоставляются продукция, партии и смены.</a:t>
             </a:r>
             <a:endParaRPr lang="en-US" sz="1200" noProof="1"/>
           </a:p>
@@ -2172,7 +2172,7 @@
                 <a:latin typeface="Arial"/>
                 <a:ea typeface="Arial"/>
               </a:rPr>
-              <a:t>1–2 недели</a:t>
+              <a:t>1-2 недели</a:t>
             </a:r>
             <a:endParaRPr lang="en-US" sz="1200" noProof="1"/>
           </a:p>
@@ -2253,7 +2253,7 @@
                 <a:latin typeface="Arial"/>
                 <a:ea typeface="Arial"/>
               </a:rPr>
-              <a:t>Сравниваются разные, но сопоставимые периоды — не одни и те же лотки. Даты переключения режимов заранее цехам не сообщаются; эталон подтверждает экспертный контроль качества.</a:t>
+              <a:t>Сравниваются разные, но сопоставимые периоды - не одни и те же лотки. Даты переключения режимов заранее цехам не сообщаются; эталон подтверждает экспертный контроль качества.</a:t>
             </a:r>
             <a:endParaRPr lang="en-US" sz="1100" noProof="1"/>
           </a:p>
@@ -2266,7 +2266,7 @@
           <p:nvPr>
             <p:extLst>
               <p:ext uri="{F5677B7D-0D2A-4D9B-9A5C-6D8D7D0E5A5D}">
-                <pptd:line xmlns:pptd="https://kimi-design.msh.team/pptd/2026" xmlns:mc="http://schemas.openxmlformats.org/markup-compatibility/2006" xmlns:m="http://schemas.openxmlformats.org/officeDocument/2006/math" xmlns:cx="http://schemas.microsoft.com/office/drawing/2014/chartex" xmlns:c="http://schemas.openxmlformats.org/drawingml/2006/chart" xmlns:a14="http://schemas.microsoft.com/office/drawing/2010/main" xmlns="" encoding="base64url">eyJ2aWV3Qm94IjpbODY0LDFdLCJwb2ludHMiOiIwLDAgODY0LDAifQ</pptd:line>
+                <pptd:line xmlns="" xmlns:a14="http://schemas.microsoft.com/office/drawing/2010/main" xmlns:c="http://schemas.openxmlformats.org/drawingml/2006/chart" xmlns:cx="http://schemas.microsoft.com/office/drawing/2014/chartex" xmlns:m="http://schemas.openxmlformats.org/officeDocument/2006/math" xmlns:mc="http://schemas.openxmlformats.org/markup-compatibility/2006" xmlns:pptd="https://kimi-design.msh.team/pptd/2026" encoding="base64url">eyJ2aWV3Qm94IjpbODY0LDFdLCJwb2ludHMiOiIwLDAgODY0LDAifQ</pptd:line>
               </p:ext>
             </p:extLst>
           </p:nvPr>
@@ -2465,7 +2465,7 @@
           <p:nvPr>
             <p:extLst>
               <p:ext uri="{F5677B7D-0D2A-4D9B-9A5C-6D8D7D0E5A5D}">
-                <pptd:line xmlns:pptd="https://kimi-design.msh.team/pptd/2026" xmlns:mc="http://schemas.openxmlformats.org/markup-compatibility/2006" xmlns:m="http://schemas.openxmlformats.org/officeDocument/2006/math" xmlns:cx="http://schemas.microsoft.com/office/drawing/2014/chartex" xmlns:c="http://schemas.openxmlformats.org/drawingml/2006/chart" xmlns:a14="http://schemas.microsoft.com/office/drawing/2010/main" xmlns="" encoding="base64url">eyJ2aWV3Qm94IjpbMSwxMTRdLCJwb2ludHMiOiIwLDAgMCwxMTQifQ</pptd:line>
+                <pptd:line xmlns="" xmlns:a14="http://schemas.microsoft.com/office/drawing/2010/main" xmlns:c="http://schemas.openxmlformats.org/drawingml/2006/chart" xmlns:cx="http://schemas.microsoft.com/office/drawing/2014/chartex" xmlns:m="http://schemas.openxmlformats.org/officeDocument/2006/math" xmlns:mc="http://schemas.openxmlformats.org/markup-compatibility/2006" xmlns:pptd="https://kimi-design.msh.team/pptd/2026" encoding="base64url">eyJ2aWV3Qm94IjpbMSwxMTRdLCJwb2ludHMiOiIwLDAgMCwxMTQifQ</pptd:line>
               </p:ext>
             </p:extLst>
           </p:nvPr>
@@ -2635,7 +2635,7 @@
                 <a:latin typeface="Arial"/>
                 <a:ea typeface="Arial"/>
               </a:rPr>
-              <a:t>Замечания — еженедельно; данные — для улучшения, не для наказаний.</a:t>
+              <a:t>Замечания - еженедельно; данные - для улучшения, не для наказаний.</a:t>
             </a:r>
             <a:endParaRPr lang="en-US" sz="1150" noProof="1"/>
           </a:p>
@@ -2741,7 +2741,7 @@
                 <a:latin typeface="Arial"/>
                 <a:ea typeface="Arial"/>
               </a:rPr>
-              <a:t>Источник: раздел 7. Плановая промышленная приёмка первой линии — 24–26 недели. Увольнение не является условием проекта.</a:t>
+              <a:t>Источник: раздел 7. Плановая промышленная приёмка первой линии - 24-26 недели. Увольнение не является условием проекта.</a:t>
             </a:r>
             <a:endParaRPr lang="en-US" sz="900" noProof="1"/>
           </a:p>
